--- a/deck/第12章-CICD流水线-课件.pptx
+++ b/deck/第12章-CICD流水线-课件.pptx
@@ -3030,6 +3030,10 @@
           </a:solidFill>
           <a:ln/>
         </p:spPr>
+        <p:txBody>
+          <a:bodyPr/>
+          <a:p/>
+        </p:txBody>
       </p:sp>
       <p:sp>
         <p:nvSpPr>
@@ -3050,6 +3054,10 @@
           </a:solidFill>
           <a:ln/>
         </p:spPr>
+        <p:txBody>
+          <a:bodyPr/>
+          <a:p/>
+        </p:txBody>
       </p:sp>
       <p:sp>
         <p:nvSpPr>
@@ -3194,6 +3202,10 @@
             <a:prstDash val="solid"/>
           </a:ln>
         </p:spPr>
+        <p:txBody>
+          <a:bodyPr/>
+          <a:p/>
+        </p:txBody>
       </p:sp>
       <p:sp>
         <p:nvSpPr>
@@ -3257,6 +3269,10 @@
             <a:tailEnd type="triangle"/>
           </a:ln>
         </p:spPr>
+        <p:txBody>
+          <a:bodyPr/>
+          <a:p/>
+        </p:txBody>
       </p:sp>
       <p:sp>
         <p:nvSpPr>
@@ -3284,6 +3300,10 @@
             <a:prstDash val="solid"/>
           </a:ln>
         </p:spPr>
+        <p:txBody>
+          <a:bodyPr/>
+          <a:p/>
+        </p:txBody>
       </p:sp>
       <p:sp>
         <p:nvSpPr>
@@ -3347,6 +3367,10 @@
             <a:tailEnd type="triangle"/>
           </a:ln>
         </p:spPr>
+        <p:txBody>
+          <a:bodyPr/>
+          <a:p/>
+        </p:txBody>
       </p:sp>
       <p:sp>
         <p:nvSpPr>
@@ -3374,6 +3398,10 @@
             <a:prstDash val="solid"/>
           </a:ln>
         </p:spPr>
+        <p:txBody>
+          <a:bodyPr/>
+          <a:p/>
+        </p:txBody>
       </p:sp>
       <p:sp>
         <p:nvSpPr>
@@ -3504,6 +3532,10 @@
           </a:solidFill>
           <a:ln/>
         </p:spPr>
+        <p:txBody>
+          <a:bodyPr/>
+          <a:p/>
+        </p:txBody>
       </p:sp>
       <p:sp>
         <p:nvSpPr>
@@ -3524,6 +3556,10 @@
           </a:solidFill>
           <a:ln/>
         </p:spPr>
+        <p:txBody>
+          <a:bodyPr/>
+          <a:p/>
+        </p:txBody>
       </p:sp>
       <p:sp>
         <p:nvSpPr>
@@ -4742,6 +4778,10 @@
             <a:prstDash val="solid"/>
           </a:ln>
         </p:spPr>
+        <p:txBody>
+          <a:bodyPr/>
+          <a:p/>
+        </p:txBody>
       </p:sp>
       <p:sp>
         <p:nvSpPr>
@@ -5532,6 +5572,10 @@
             <a:prstDash val="solid"/>
           </a:ln>
         </p:spPr>
+        <p:txBody>
+          <a:bodyPr/>
+          <a:p/>
+        </p:txBody>
       </p:sp>
       <p:sp>
         <p:nvSpPr>
@@ -5637,6 +5681,10 @@
           </a:solidFill>
           <a:ln/>
         </p:spPr>
+        <p:txBody>
+          <a:bodyPr/>
+          <a:p/>
+        </p:txBody>
       </p:sp>
       <p:sp>
         <p:nvSpPr>
@@ -5657,6 +5705,10 @@
           </a:solidFill>
           <a:ln/>
         </p:spPr>
+        <p:txBody>
+          <a:bodyPr/>
+          <a:p/>
+        </p:txBody>
       </p:sp>
       <p:sp>
         <p:nvSpPr>
@@ -5879,6 +5931,10 @@
             <a:prstDash val="solid"/>
           </a:ln>
         </p:spPr>
+        <p:txBody>
+          <a:bodyPr/>
+          <a:p/>
+        </p:txBody>
       </p:sp>
       <p:sp>
         <p:nvSpPr>
@@ -5959,6 +6015,10 @@
             <a:tailEnd type="triangle"/>
           </a:ln>
         </p:spPr>
+        <p:txBody>
+          <a:bodyPr/>
+          <a:p/>
+        </p:txBody>
       </p:sp>
       <p:sp>
         <p:nvSpPr>
@@ -6025,6 +6085,10 @@
             <a:prstDash val="solid"/>
           </a:ln>
         </p:spPr>
+        <p:txBody>
+          <a:bodyPr/>
+          <a:p/>
+        </p:txBody>
       </p:sp>
       <p:sp>
         <p:nvSpPr>
@@ -6105,6 +6169,10 @@
             <a:tailEnd type="triangle"/>
           </a:ln>
         </p:spPr>
+        <p:txBody>
+          <a:bodyPr/>
+          <a:p/>
+        </p:txBody>
       </p:sp>
       <p:sp>
         <p:nvSpPr>
@@ -6171,6 +6239,10 @@
             <a:prstDash val="solid"/>
           </a:ln>
         </p:spPr>
+        <p:txBody>
+          <a:bodyPr/>
+          <a:p/>
+        </p:txBody>
       </p:sp>
       <p:sp>
         <p:nvSpPr>
@@ -6939,6 +7011,10 @@
           </a:solidFill>
           <a:ln/>
         </p:spPr>
+        <p:txBody>
+          <a:bodyPr/>
+          <a:p/>
+        </p:txBody>
       </p:sp>
       <p:sp>
         <p:nvSpPr>
@@ -6959,6 +7035,10 @@
           </a:solidFill>
           <a:ln/>
         </p:spPr>
+        <p:txBody>
+          <a:bodyPr/>
+          <a:p/>
+        </p:txBody>
       </p:sp>
       <p:sp>
         <p:nvSpPr>
@@ -7149,6 +7229,10 @@
             </a:outerShdw>
           </a:effectLst>
         </p:spPr>
+        <p:txBody>
+          <a:bodyPr/>
+          <a:p/>
+        </p:txBody>
       </p:sp>
       <p:sp>
         <p:nvSpPr>
@@ -7295,6 +7379,10 @@
             </a:outerShdw>
           </a:effectLst>
         </p:spPr>
+        <p:txBody>
+          <a:bodyPr/>
+          <a:p/>
+        </p:txBody>
       </p:sp>
       <p:sp>
         <p:nvSpPr>
@@ -7473,6 +7561,10 @@
             <a:prstDash val="solid"/>
           </a:ln>
         </p:spPr>
+        <p:txBody>
+          <a:bodyPr/>
+          <a:p/>
+        </p:txBody>
       </p:sp>
       <p:sp>
         <p:nvSpPr>
@@ -7587,6 +7679,10 @@
           </a:solidFill>
           <a:ln/>
         </p:spPr>
+        <p:txBody>
+          <a:bodyPr/>
+          <a:p/>
+        </p:txBody>
       </p:sp>
       <p:sp>
         <p:nvSpPr>
@@ -7607,6 +7703,10 @@
           </a:solidFill>
           <a:ln/>
         </p:spPr>
+        <p:txBody>
+          <a:bodyPr/>
+          <a:p/>
+        </p:txBody>
       </p:sp>
       <p:sp>
         <p:nvSpPr>
@@ -7797,6 +7897,10 @@
             </a:outerShdw>
           </a:effectLst>
         </p:spPr>
+        <p:txBody>
+          <a:bodyPr/>
+          <a:p/>
+        </p:txBody>
       </p:sp>
       <p:sp>
         <p:nvSpPr>
@@ -7817,6 +7921,10 @@
           </a:solidFill>
           <a:ln/>
         </p:spPr>
+        <p:txBody>
+          <a:bodyPr/>
+          <a:p/>
+        </p:txBody>
       </p:sp>
       <p:sp>
         <p:nvSpPr>
@@ -7915,6 +8023,10 @@
           </a:solidFill>
           <a:ln/>
         </p:spPr>
+        <p:txBody>
+          <a:bodyPr/>
+          <a:p/>
+        </p:txBody>
       </p:sp>
       <p:sp>
         <p:nvSpPr>
@@ -8013,6 +8125,10 @@
           </a:solidFill>
           <a:ln/>
         </p:spPr>
+        <p:txBody>
+          <a:bodyPr/>
+          <a:p/>
+        </p:txBody>
       </p:sp>
       <p:sp>
         <p:nvSpPr>
@@ -8111,6 +8227,10 @@
           </a:solidFill>
           <a:ln/>
         </p:spPr>
+        <p:txBody>
+          <a:bodyPr/>
+          <a:p/>
+        </p:txBody>
       </p:sp>
       <p:sp>
         <p:nvSpPr>
@@ -8209,6 +8329,10 @@
           </a:solidFill>
           <a:ln/>
         </p:spPr>
+        <p:txBody>
+          <a:bodyPr/>
+          <a:p/>
+        </p:txBody>
       </p:sp>
       <p:sp>
         <p:nvSpPr>
@@ -8321,6 +8445,10 @@
             </a:outerShdw>
           </a:effectLst>
         </p:spPr>
+        <p:txBody>
+          <a:bodyPr/>
+          <a:p/>
+        </p:txBody>
       </p:sp>
       <p:sp>
         <p:nvSpPr>
@@ -8387,6 +8515,10 @@
             <a:prstDash val="solid"/>
           </a:ln>
         </p:spPr>
+        <p:txBody>
+          <a:bodyPr/>
+          <a:p/>
+        </p:txBody>
       </p:sp>
       <p:sp>
         <p:nvSpPr>
@@ -8492,6 +8624,10 @@
           </a:solidFill>
           <a:ln/>
         </p:spPr>
+        <p:txBody>
+          <a:bodyPr/>
+          <a:p/>
+        </p:txBody>
       </p:sp>
       <p:sp>
         <p:nvSpPr>
@@ -8512,6 +8648,10 @@
           </a:solidFill>
           <a:ln/>
         </p:spPr>
+        <p:txBody>
+          <a:bodyPr/>
+          <a:p/>
+        </p:txBody>
       </p:sp>
       <p:sp>
         <p:nvSpPr>
@@ -9730,6 +9870,10 @@
             <a:prstDash val="solid"/>
           </a:ln>
         </p:spPr>
+        <p:txBody>
+          <a:bodyPr/>
+          <a:p/>
+        </p:txBody>
       </p:sp>
       <p:sp>
         <p:nvSpPr>
@@ -9863,6 +10007,10 @@
           </a:solidFill>
           <a:ln/>
         </p:spPr>
+        <p:txBody>
+          <a:bodyPr/>
+          <a:p/>
+        </p:txBody>
       </p:sp>
       <p:sp>
         <p:nvSpPr>
@@ -9883,6 +10031,10 @@
           </a:solidFill>
           <a:ln/>
         </p:spPr>
+        <p:txBody>
+          <a:bodyPr/>
+          <a:p/>
+        </p:txBody>
       </p:sp>
       <p:sp>
         <p:nvSpPr>
@@ -10073,6 +10225,10 @@
             </a:outerShdw>
           </a:effectLst>
         </p:spPr>
+        <p:txBody>
+          <a:bodyPr/>
+          <a:p/>
+        </p:txBody>
       </p:sp>
       <p:sp>
         <p:nvSpPr>
@@ -11004,6 +11160,10 @@
             </a:outerShdw>
           </a:effectLst>
         </p:spPr>
+        <p:txBody>
+          <a:bodyPr/>
+          <a:p/>
+        </p:txBody>
       </p:sp>
       <p:sp>
         <p:nvSpPr>
@@ -11063,6 +11223,10 @@
           </a:solidFill>
           <a:ln/>
         </p:spPr>
+        <p:txBody>
+          <a:bodyPr/>
+          <a:p/>
+        </p:txBody>
       </p:sp>
       <p:sp>
         <p:nvSpPr>
@@ -11161,6 +11325,10 @@
           </a:solidFill>
           <a:ln/>
         </p:spPr>
+        <p:txBody>
+          <a:bodyPr/>
+          <a:p/>
+        </p:txBody>
       </p:sp>
       <p:sp>
         <p:nvSpPr>
@@ -11259,6 +11427,10 @@
           </a:solidFill>
           <a:ln/>
         </p:spPr>
+        <p:txBody>
+          <a:bodyPr/>
+          <a:p/>
+        </p:txBody>
       </p:sp>
       <p:sp>
         <p:nvSpPr>
@@ -11357,6 +11529,10 @@
           </a:solidFill>
           <a:ln/>
         </p:spPr>
+        <p:txBody>
+          <a:bodyPr/>
+          <a:p/>
+        </p:txBody>
       </p:sp>
       <p:sp>
         <p:nvSpPr>
@@ -11526,6 +11702,10 @@
           </a:solidFill>
           <a:ln/>
         </p:spPr>
+        <p:txBody>
+          <a:bodyPr/>
+          <a:p/>
+        </p:txBody>
       </p:sp>
       <p:sp>
         <p:nvSpPr>
@@ -11546,6 +11726,10 @@
           </a:solidFill>
           <a:ln/>
         </p:spPr>
+        <p:txBody>
+          <a:bodyPr/>
+          <a:p/>
+        </p:txBody>
       </p:sp>
       <p:sp>
         <p:nvSpPr>
@@ -11729,6 +11913,10 @@
             <a:prstDash val="solid"/>
           </a:ln>
         </p:spPr>
+        <p:txBody>
+          <a:bodyPr/>
+          <a:p/>
+        </p:txBody>
       </p:sp>
       <p:sp>
         <p:nvSpPr>
@@ -12837,6 +13025,10 @@
             </a:outerShdw>
           </a:effectLst>
         </p:spPr>
+        <p:txBody>
+          <a:bodyPr/>
+          <a:p/>
+        </p:txBody>
       </p:sp>
       <p:sp>
         <p:nvSpPr>
@@ -13038,6 +13230,10 @@
           </a:solidFill>
           <a:ln/>
         </p:spPr>
+        <p:txBody>
+          <a:bodyPr/>
+          <a:p/>
+        </p:txBody>
       </p:sp>
       <p:sp>
         <p:nvSpPr>
@@ -13058,6 +13254,10 @@
           </a:solidFill>
           <a:ln/>
         </p:spPr>
+        <p:txBody>
+          <a:bodyPr/>
+          <a:p/>
+        </p:txBody>
       </p:sp>
       <p:sp>
         <p:nvSpPr>
@@ -13248,6 +13448,10 @@
             </a:outerShdw>
           </a:effectLst>
         </p:spPr>
+        <p:txBody>
+          <a:bodyPr/>
+          <a:p/>
+        </p:txBody>
       </p:sp>
       <p:sp>
         <p:nvSpPr>
@@ -13402,6 +13606,10 @@
             </a:outerShdw>
           </a:effectLst>
         </p:spPr>
+        <p:txBody>
+          <a:bodyPr/>
+          <a:p/>
+        </p:txBody>
       </p:sp>
       <p:sp>
         <p:nvSpPr>
@@ -13551,6 +13759,10 @@
             </a:outerShdw>
           </a:effectLst>
         </p:spPr>
+        <p:txBody>
+          <a:bodyPr/>
+          <a:p/>
+        </p:txBody>
       </p:sp>
       <p:sp>
         <p:nvSpPr>
@@ -13684,6 +13896,10 @@
           </a:solidFill>
           <a:ln/>
         </p:spPr>
+        <p:txBody>
+          <a:bodyPr/>
+          <a:p/>
+        </p:txBody>
       </p:sp>
       <p:sp>
         <p:nvSpPr>
@@ -13704,6 +13920,10 @@
           </a:solidFill>
           <a:ln/>
         </p:spPr>
+        <p:txBody>
+          <a:bodyPr/>
+          <a:p/>
+        </p:txBody>
       </p:sp>
       <p:sp>
         <p:nvSpPr>
@@ -15166,6 +15386,10 @@
             </a:outerShdw>
           </a:effectLst>
         </p:spPr>
+        <p:txBody>
+          <a:bodyPr/>
+          <a:p/>
+        </p:txBody>
       </p:sp>
       <p:sp>
         <p:nvSpPr>
@@ -15367,6 +15591,10 @@
           </a:solidFill>
           <a:ln/>
         </p:spPr>
+        <p:txBody>
+          <a:bodyPr/>
+          <a:p/>
+        </p:txBody>
       </p:sp>
       <p:sp>
         <p:nvSpPr>
@@ -15387,6 +15615,10 @@
           </a:solidFill>
           <a:ln/>
         </p:spPr>
+        <p:txBody>
+          <a:bodyPr/>
+          <a:p/>
+        </p:txBody>
       </p:sp>
       <p:sp>
         <p:nvSpPr>
@@ -16506,6 +16738,10 @@
             <a:prstDash val="solid"/>
           </a:ln>
         </p:spPr>
+        <p:txBody>
+          <a:bodyPr/>
+          <a:p/>
+        </p:txBody>
       </p:sp>
       <p:sp>
         <p:nvSpPr>
@@ -17163,6 +17399,10 @@
           </a:solidFill>
           <a:ln/>
         </p:spPr>
+        <p:txBody>
+          <a:bodyPr/>
+          <a:p/>
+        </p:txBody>
       </p:sp>
       <p:sp>
         <p:nvSpPr>
@@ -17183,6 +17423,10 @@
           </a:solidFill>
           <a:ln/>
         </p:spPr>
+        <p:txBody>
+          <a:bodyPr/>
+          <a:p/>
+        </p:txBody>
       </p:sp>
       <p:sp>
         <p:nvSpPr>
@@ -17373,6 +17617,10 @@
             </a:outerShdw>
           </a:effectLst>
         </p:spPr>
+        <p:txBody>
+          <a:bodyPr/>
+          <a:p/>
+        </p:txBody>
       </p:sp>
       <p:sp>
         <p:nvSpPr>
@@ -17549,6 +17797,10 @@
             </a:outerShdw>
           </a:effectLst>
         </p:spPr>
+        <p:txBody>
+          <a:bodyPr/>
+          <a:p/>
+        </p:txBody>
       </p:sp>
       <p:sp>
         <p:nvSpPr>
@@ -17615,6 +17867,10 @@
             <a:prstDash val="solid"/>
           </a:ln>
         </p:spPr>
+        <p:txBody>
+          <a:bodyPr/>
+          <a:p/>
+        </p:txBody>
       </p:sp>
       <p:sp>
         <p:nvSpPr>
@@ -17678,6 +17934,10 @@
             <a:tailEnd type="triangle"/>
           </a:ln>
         </p:spPr>
+        <p:txBody>
+          <a:bodyPr/>
+          <a:p/>
+        </p:txBody>
       </p:sp>
       <p:sp>
         <p:nvSpPr>
@@ -17705,6 +17965,10 @@
             <a:prstDash val="solid"/>
           </a:ln>
         </p:spPr>
+        <p:txBody>
+          <a:bodyPr/>
+          <a:p/>
+        </p:txBody>
       </p:sp>
       <p:sp>
         <p:nvSpPr>
@@ -17771,6 +18035,10 @@
             <a:prstDash val="solid"/>
           </a:ln>
         </p:spPr>
+        <p:txBody>
+          <a:bodyPr/>
+          <a:p/>
+        </p:txBody>
       </p:sp>
       <p:sp>
         <p:nvSpPr>
@@ -17805,7 +18073,7 @@
                 <a:ea typeface="微软雅黑" pitchFamily="34" charset="-122"/>
                 <a:cs typeface="微软雅黑" pitchFamily="34" charset="-120"/>
               </a:rPr>
-              <a:t>会话管理 📤 上传 jar</a:t>
+              <a:t>实例详情页上传 jar</a:t>
             </a:r>
             <a:endParaRPr lang="en-US" sz="1050" dirty="0"/>
           </a:p>
@@ -17834,6 +18102,10 @@
             <a:tailEnd type="triangle"/>
           </a:ln>
         </p:spPr>
+        <p:txBody>
+          <a:bodyPr/>
+          <a:p/>
+        </p:txBody>
       </p:sp>
       <p:sp>
         <p:nvSpPr>
@@ -17861,6 +18133,10 @@
             <a:prstDash val="solid"/>
           </a:ln>
         </p:spPr>
+        <p:txBody>
+          <a:bodyPr/>
+          <a:p/>
+        </p:txBody>
       </p:sp>
       <p:sp>
         <p:nvSpPr>
@@ -17927,6 +18203,10 @@
             <a:prstDash val="solid"/>
           </a:ln>
         </p:spPr>
+        <p:txBody>
+          <a:bodyPr/>
+          <a:p/>
+        </p:txBody>
       </p:sp>
       <p:sp>
         <p:nvSpPr>
@@ -17990,6 +18270,10 @@
             <a:tailEnd type="triangle"/>
           </a:ln>
         </p:spPr>
+        <p:txBody>
+          <a:bodyPr/>
+          <a:p/>
+        </p:txBody>
       </p:sp>
       <p:sp>
         <p:nvSpPr>
@@ -18017,6 +18301,10 @@
             <a:prstDash val="solid"/>
           </a:ln>
         </p:spPr>
+        <p:txBody>
+          <a:bodyPr/>
+          <a:p/>
+        </p:txBody>
       </p:sp>
       <p:sp>
         <p:nvSpPr>
@@ -18083,6 +18371,10 @@
             <a:prstDash val="solid"/>
           </a:ln>
         </p:spPr>
+        <p:txBody>
+          <a:bodyPr/>
+          <a:p/>
+        </p:txBody>
       </p:sp>
       <p:sp>
         <p:nvSpPr>
@@ -18146,6 +18438,10 @@
             <a:tailEnd type="triangle"/>
           </a:ln>
         </p:spPr>
+        <p:txBody>
+          <a:bodyPr/>
+          <a:p/>
+        </p:txBody>
       </p:sp>
       <p:sp>
         <p:nvSpPr>
@@ -18173,6 +18469,10 @@
             <a:prstDash val="solid"/>
           </a:ln>
         </p:spPr>
+        <p:txBody>
+          <a:bodyPr/>
+          <a:p/>
+        </p:txBody>
       </p:sp>
       <p:sp>
         <p:nvSpPr>
@@ -18239,6 +18539,10 @@
             <a:prstDash val="solid"/>
           </a:ln>
         </p:spPr>
+        <p:txBody>
+          <a:bodyPr/>
+          <a:p/>
+        </p:txBody>
       </p:sp>
       <p:sp>
         <p:nvSpPr>
@@ -18302,6 +18606,10 @@
             <a:tailEnd type="triangle"/>
           </a:ln>
         </p:spPr>
+        <p:txBody>
+          <a:bodyPr/>
+          <a:p/>
+        </p:txBody>
       </p:sp>
       <p:sp>
         <p:nvSpPr>
@@ -18329,6 +18637,10 @@
             <a:prstDash val="solid"/>
           </a:ln>
         </p:spPr>
+        <p:txBody>
+          <a:bodyPr/>
+          <a:p/>
+        </p:txBody>
       </p:sp>
       <p:sp>
         <p:nvSpPr>
@@ -18395,6 +18707,10 @@
             <a:prstDash val="solid"/>
           </a:ln>
         </p:spPr>
+        <p:txBody>
+          <a:bodyPr/>
+          <a:p/>
+        </p:txBody>
       </p:sp>
       <p:sp>
         <p:nvSpPr>
@@ -18458,6 +18774,10 @@
             <a:tailEnd type="triangle"/>
           </a:ln>
         </p:spPr>
+        <p:txBody>
+          <a:bodyPr/>
+          <a:p/>
+        </p:txBody>
       </p:sp>
       <p:sp>
         <p:nvSpPr>
@@ -18485,6 +18805,10 @@
             <a:prstDash val="solid"/>
           </a:ln>
         </p:spPr>
+        <p:txBody>
+          <a:bodyPr/>
+          <a:p/>
+        </p:txBody>
       </p:sp>
       <p:sp>
         <p:nvSpPr>
@@ -18576,6 +18900,10 @@
           </a:solidFill>
           <a:ln/>
         </p:spPr>
+        <p:txBody>
+          <a:bodyPr/>
+          <a:p/>
+        </p:txBody>
       </p:sp>
       <p:sp>
         <p:nvSpPr>
@@ -18596,6 +18924,10 @@
           </a:solidFill>
           <a:ln/>
         </p:spPr>
+        <p:txBody>
+          <a:bodyPr/>
+          <a:p/>
+        </p:txBody>
       </p:sp>
       <p:sp>
         <p:nvSpPr>
@@ -19361,6 +19693,10 @@
             <a:prstDash val="solid"/>
           </a:ln>
         </p:spPr>
+        <p:txBody>
+          <a:bodyPr/>
+          <a:p/>
+        </p:txBody>
       </p:sp>
       <p:sp>
         <p:nvSpPr>
@@ -19517,6 +19853,10 @@
             </a:outerShdw>
           </a:effectLst>
         </p:spPr>
+        <p:txBody>
+          <a:bodyPr/>
+          <a:p/>
+        </p:txBody>
       </p:sp>
       <p:sp>
         <p:nvSpPr>
@@ -19625,6 +19965,10 @@
             <a:prstDash val="solid"/>
           </a:ln>
         </p:spPr>
+        <p:txBody>
+          <a:bodyPr/>
+          <a:p/>
+        </p:txBody>
       </p:sp>
       <p:sp>
         <p:nvSpPr>
@@ -19782,6 +20126,10 @@
           </a:solidFill>
           <a:ln/>
         </p:spPr>
+        <p:txBody>
+          <a:bodyPr/>
+          <a:p/>
+        </p:txBody>
       </p:sp>
       <p:sp>
         <p:nvSpPr>
@@ -19802,6 +20150,10 @@
           </a:solidFill>
           <a:ln/>
         </p:spPr>
+        <p:txBody>
+          <a:bodyPr/>
+          <a:p/>
+        </p:txBody>
       </p:sp>
       <p:sp>
         <p:nvSpPr>
@@ -19992,6 +20344,10 @@
             </a:outerShdw>
           </a:effectLst>
         </p:spPr>
+        <p:txBody>
+          <a:bodyPr/>
+          <a:p/>
+        </p:txBody>
       </p:sp>
       <p:sp>
         <p:nvSpPr>
@@ -20791,6 +21147,10 @@
             <a:prstDash val="solid"/>
           </a:ln>
         </p:spPr>
+        <p:txBody>
+          <a:bodyPr/>
+          <a:p/>
+        </p:txBody>
       </p:sp>
       <p:sp>
         <p:nvSpPr>
@@ -20896,6 +21256,10 @@
           </a:solidFill>
           <a:ln/>
         </p:spPr>
+        <p:txBody>
+          <a:bodyPr/>
+          <a:p/>
+        </p:txBody>
       </p:sp>
       <p:sp>
         <p:nvSpPr>
@@ -20916,6 +21280,10 @@
           </a:solidFill>
           <a:ln/>
         </p:spPr>
+        <p:txBody>
+          <a:bodyPr/>
+          <a:p/>
+        </p:txBody>
       </p:sp>
       <p:sp>
         <p:nvSpPr>
@@ -21145,6 +21513,10 @@
             </a:outerShdw>
           </a:effectLst>
         </p:spPr>
+        <p:txBody>
+          <a:bodyPr/>
+          <a:p/>
+        </p:txBody>
       </p:sp>
       <p:sp>
         <p:nvSpPr>
@@ -21165,6 +21537,10 @@
           </a:solidFill>
           <a:ln/>
         </p:spPr>
+        <p:txBody>
+          <a:bodyPr/>
+          <a:p/>
+        </p:txBody>
       </p:sp>
       <p:sp>
         <p:nvSpPr>
@@ -21280,6 +21656,10 @@
             </a:outerShdw>
           </a:effectLst>
         </p:spPr>
+        <p:txBody>
+          <a:bodyPr/>
+          <a:p/>
+        </p:txBody>
       </p:sp>
       <p:sp>
         <p:nvSpPr>
@@ -21300,6 +21680,10 @@
           </a:solidFill>
           <a:ln/>
         </p:spPr>
+        <p:txBody>
+          <a:bodyPr/>
+          <a:p/>
+        </p:txBody>
       </p:sp>
       <p:sp>
         <p:nvSpPr>
@@ -21415,6 +21799,10 @@
             </a:outerShdw>
           </a:effectLst>
         </p:spPr>
+        <p:txBody>
+          <a:bodyPr/>
+          <a:p/>
+        </p:txBody>
       </p:sp>
       <p:sp>
         <p:nvSpPr>
@@ -21435,6 +21823,10 @@
           </a:solidFill>
           <a:ln/>
         </p:spPr>
+        <p:txBody>
+          <a:bodyPr/>
+          <a:p/>
+        </p:txBody>
       </p:sp>
       <p:sp>
         <p:nvSpPr>
@@ -21568,6 +21960,10 @@
           </a:solidFill>
           <a:ln/>
         </p:spPr>
+        <p:txBody>
+          <a:bodyPr/>
+          <a:p/>
+        </p:txBody>
       </p:sp>
       <p:sp>
         <p:nvSpPr>
@@ -21588,6 +21984,10 @@
           </a:solidFill>
           <a:ln/>
         </p:spPr>
+        <p:txBody>
+          <a:bodyPr/>
+          <a:p/>
+        </p:txBody>
       </p:sp>
       <p:sp>
         <p:nvSpPr>
@@ -23081,6 +23481,10 @@
           </a:solidFill>
           <a:ln/>
         </p:spPr>
+        <p:txBody>
+          <a:bodyPr/>
+          <a:p/>
+        </p:txBody>
       </p:sp>
       <p:sp>
         <p:nvSpPr>
@@ -23101,6 +23505,10 @@
           </a:solidFill>
           <a:ln/>
         </p:spPr>
+        <p:txBody>
+          <a:bodyPr/>
+          <a:p/>
+        </p:txBody>
       </p:sp>
       <p:sp>
         <p:nvSpPr>
@@ -23291,6 +23699,10 @@
             </a:outerShdw>
           </a:effectLst>
         </p:spPr>
+        <p:txBody>
+          <a:bodyPr/>
+          <a:p/>
+        </p:txBody>
       </p:sp>
       <p:sp>
         <p:nvSpPr>
@@ -23311,6 +23723,10 @@
           </a:solidFill>
           <a:ln/>
         </p:spPr>
+        <p:txBody>
+          <a:bodyPr/>
+          <a:p/>
+        </p:txBody>
       </p:sp>
       <p:sp>
         <p:nvSpPr>
@@ -23423,6 +23839,10 @@
             </a:outerShdw>
           </a:effectLst>
         </p:spPr>
+        <p:txBody>
+          <a:bodyPr/>
+          <a:p/>
+        </p:txBody>
       </p:sp>
       <p:sp>
         <p:nvSpPr>
@@ -23443,6 +23863,10 @@
           </a:solidFill>
           <a:ln/>
         </p:spPr>
+        <p:txBody>
+          <a:bodyPr/>
+          <a:p/>
+        </p:txBody>
       </p:sp>
       <p:sp>
         <p:nvSpPr>
@@ -23555,6 +23979,10 @@
             </a:outerShdw>
           </a:effectLst>
         </p:spPr>
+        <p:txBody>
+          <a:bodyPr/>
+          <a:p/>
+        </p:txBody>
       </p:sp>
       <p:sp>
         <p:nvSpPr>
@@ -23575,6 +24003,10 @@
           </a:solidFill>
           <a:ln/>
         </p:spPr>
+        <p:txBody>
+          <a:bodyPr/>
+          <a:p/>
+        </p:txBody>
       </p:sp>
       <p:sp>
         <p:nvSpPr>
@@ -23687,6 +24119,10 @@
             </a:outerShdw>
           </a:effectLst>
         </p:spPr>
+        <p:txBody>
+          <a:bodyPr/>
+          <a:p/>
+        </p:txBody>
       </p:sp>
       <p:sp>
         <p:nvSpPr>
@@ -23707,6 +24143,10 @@
           </a:solidFill>
           <a:ln/>
         </p:spPr>
+        <p:txBody>
+          <a:bodyPr/>
+          <a:p/>
+        </p:txBody>
       </p:sp>
       <p:sp>
         <p:nvSpPr>
@@ -23819,6 +24259,10 @@
             </a:outerShdw>
           </a:effectLst>
         </p:spPr>
+        <p:txBody>
+          <a:bodyPr/>
+          <a:p/>
+        </p:txBody>
       </p:sp>
       <p:sp>
         <p:nvSpPr>
@@ -23839,6 +24283,10 @@
           </a:solidFill>
           <a:ln/>
         </p:spPr>
+        <p:txBody>
+          <a:bodyPr/>
+          <a:p/>
+        </p:txBody>
       </p:sp>
       <p:sp>
         <p:nvSpPr>
@@ -23969,6 +24417,10 @@
           </a:solidFill>
           <a:ln/>
         </p:spPr>
+        <p:txBody>
+          <a:bodyPr/>
+          <a:p/>
+        </p:txBody>
       </p:sp>
       <p:sp>
         <p:nvSpPr>
@@ -24035,6 +24487,10 @@
             <a:prstDash val="solid"/>
           </a:ln>
         </p:spPr>
+        <p:txBody>
+          <a:bodyPr/>
+          <a:p/>
+        </p:txBody>
       </p:sp>
       <p:sp>
         <p:nvSpPr>
@@ -24055,6 +24511,10 @@
           </a:solidFill>
           <a:ln/>
         </p:spPr>
+        <p:txBody>
+          <a:bodyPr/>
+          <a:p/>
+        </p:txBody>
       </p:sp>
       <p:sp>
         <p:nvSpPr>
@@ -24199,6 +24659,10 @@
             <a:prstDash val="solid"/>
           </a:ln>
         </p:spPr>
+        <p:txBody>
+          <a:bodyPr/>
+          <a:p/>
+        </p:txBody>
       </p:sp>
       <p:sp>
         <p:nvSpPr>
@@ -24219,6 +24683,10 @@
           </a:solidFill>
           <a:ln/>
         </p:spPr>
+        <p:txBody>
+          <a:bodyPr/>
+          <a:p/>
+        </p:txBody>
       </p:sp>
       <p:sp>
         <p:nvSpPr>
@@ -24363,6 +24831,10 @@
             <a:prstDash val="solid"/>
           </a:ln>
         </p:spPr>
+        <p:txBody>
+          <a:bodyPr/>
+          <a:p/>
+        </p:txBody>
       </p:sp>
       <p:sp>
         <p:nvSpPr>
@@ -24383,6 +24855,10 @@
           </a:solidFill>
           <a:ln/>
         </p:spPr>
+        <p:txBody>
+          <a:bodyPr/>
+          <a:p/>
+        </p:txBody>
       </p:sp>
       <p:sp>
         <p:nvSpPr>
@@ -24527,6 +25003,10 @@
             <a:prstDash val="solid"/>
           </a:ln>
         </p:spPr>
+        <p:txBody>
+          <a:bodyPr/>
+          <a:p/>
+        </p:txBody>
       </p:sp>
       <p:sp>
         <p:nvSpPr>
@@ -24547,6 +25027,10 @@
           </a:solidFill>
           <a:ln/>
         </p:spPr>
+        <p:txBody>
+          <a:bodyPr/>
+          <a:p/>
+        </p:txBody>
       </p:sp>
       <p:sp>
         <p:nvSpPr>
@@ -24716,6 +25200,10 @@
           </a:solidFill>
           <a:ln/>
         </p:spPr>
+        <p:txBody>
+          <a:bodyPr/>
+          <a:p/>
+        </p:txBody>
       </p:sp>
       <p:sp>
         <p:nvSpPr>
@@ -24736,6 +25224,10 @@
           </a:solidFill>
           <a:ln/>
         </p:spPr>
+        <p:txBody>
+          <a:bodyPr/>
+          <a:p/>
+        </p:txBody>
       </p:sp>
       <p:sp>
         <p:nvSpPr>
@@ -26019,6 +26511,10 @@
             <a:prstDash val="solid"/>
           </a:ln>
         </p:spPr>
+        <p:txBody>
+          <a:bodyPr/>
+          <a:p/>
+        </p:txBody>
       </p:sp>
       <p:sp>
         <p:nvSpPr>
@@ -26163,6 +26659,10 @@
           </a:solidFill>
           <a:ln/>
         </p:spPr>
+        <p:txBody>
+          <a:bodyPr/>
+          <a:p/>
+        </p:txBody>
       </p:sp>
       <p:sp>
         <p:nvSpPr>
@@ -26183,6 +26683,10 @@
           </a:solidFill>
           <a:ln/>
         </p:spPr>
+        <p:txBody>
+          <a:bodyPr/>
+          <a:p/>
+        </p:txBody>
       </p:sp>
       <p:sp>
         <p:nvSpPr>
@@ -26373,6 +26877,10 @@
             </a:outerShdw>
           </a:effectLst>
         </p:spPr>
+        <p:txBody>
+          <a:bodyPr/>
+          <a:p/>
+        </p:txBody>
       </p:sp>
       <p:sp>
         <p:nvSpPr>
@@ -26393,6 +26901,10 @@
           </a:solidFill>
           <a:ln/>
         </p:spPr>
+        <p:txBody>
+          <a:bodyPr/>
+          <a:p/>
+        </p:txBody>
       </p:sp>
       <p:sp>
         <p:nvSpPr>
@@ -26547,6 +27059,10 @@
             </a:outerShdw>
           </a:effectLst>
         </p:spPr>
+        <p:txBody>
+          <a:bodyPr/>
+          <a:p/>
+        </p:txBody>
       </p:sp>
       <p:sp>
         <p:nvSpPr>
@@ -26567,6 +27083,10 @@
           </a:solidFill>
           <a:ln/>
         </p:spPr>
+        <p:txBody>
+          <a:bodyPr/>
+          <a:p/>
+        </p:txBody>
       </p:sp>
       <p:sp>
         <p:nvSpPr>
@@ -26721,6 +27241,10 @@
             </a:outerShdw>
           </a:effectLst>
         </p:spPr>
+        <p:txBody>
+          <a:bodyPr/>
+          <a:p/>
+        </p:txBody>
       </p:sp>
       <p:sp>
         <p:nvSpPr>
@@ -26741,6 +27265,10 @@
           </a:solidFill>
           <a:ln/>
         </p:spPr>
+        <p:txBody>
+          <a:bodyPr/>
+          <a:p/>
+        </p:txBody>
       </p:sp>
       <p:sp>
         <p:nvSpPr>
@@ -26895,6 +27423,10 @@
             </a:outerShdw>
           </a:effectLst>
         </p:spPr>
+        <p:txBody>
+          <a:bodyPr/>
+          <a:p/>
+        </p:txBody>
       </p:sp>
       <p:sp>
         <p:nvSpPr>
@@ -26915,6 +27447,10 @@
           </a:solidFill>
           <a:ln/>
         </p:spPr>
+        <p:txBody>
+          <a:bodyPr/>
+          <a:p/>
+        </p:txBody>
       </p:sp>
       <p:sp>
         <p:nvSpPr>
@@ -27069,6 +27605,10 @@
             </a:outerShdw>
           </a:effectLst>
         </p:spPr>
+        <p:txBody>
+          <a:bodyPr/>
+          <a:p/>
+        </p:txBody>
       </p:sp>
       <p:sp>
         <p:nvSpPr>
@@ -27089,6 +27629,10 @@
           </a:solidFill>
           <a:ln/>
         </p:spPr>
+        <p:txBody>
+          <a:bodyPr/>
+          <a:p/>
+        </p:txBody>
       </p:sp>
       <p:sp>
         <p:nvSpPr>
@@ -27236,6 +27780,10 @@
             <a:prstDash val="solid"/>
           </a:ln>
         </p:spPr>
+        <p:txBody>
+          <a:bodyPr/>
+          <a:p/>
+        </p:txBody>
       </p:sp>
       <p:sp>
         <p:nvSpPr>
@@ -27348,6 +27896,10 @@
           </a:solidFill>
           <a:ln/>
         </p:spPr>
+        <p:txBody>
+          <a:bodyPr/>
+          <a:p/>
+        </p:txBody>
       </p:sp>
       <p:sp>
         <p:nvSpPr>
@@ -27368,6 +27920,10 @@
           </a:solidFill>
           <a:ln/>
         </p:spPr>
+        <p:txBody>
+          <a:bodyPr/>
+          <a:p/>
+        </p:txBody>
       </p:sp>
       <p:sp>
         <p:nvSpPr>
@@ -27558,6 +28114,10 @@
             </a:outerShdw>
           </a:effectLst>
         </p:spPr>
+        <p:txBody>
+          <a:bodyPr/>
+          <a:p/>
+        </p:txBody>
       </p:sp>
       <p:sp>
         <p:nvSpPr>
@@ -27697,6 +28257,10 @@
             <a:prstDash val="solid"/>
           </a:ln>
         </p:spPr>
+        <p:txBody>
+          <a:bodyPr/>
+          <a:p/>
+        </p:txBody>
       </p:sp>
       <p:sp>
         <p:nvSpPr>
@@ -27926,6 +28490,10 @@
             </a:outerShdw>
           </a:effectLst>
         </p:spPr>
+        <p:txBody>
+          <a:bodyPr/>
+          <a:p/>
+        </p:txBody>
       </p:sp>
       <p:sp>
         <p:nvSpPr>
@@ -28017,6 +28585,10 @@
           </a:solidFill>
           <a:ln/>
         </p:spPr>
+        <p:txBody>
+          <a:bodyPr/>
+          <a:p/>
+        </p:txBody>
       </p:sp>
       <p:sp>
         <p:nvSpPr>
@@ -28037,6 +28609,10 @@
           </a:solidFill>
           <a:ln/>
         </p:spPr>
+        <p:txBody>
+          <a:bodyPr/>
+          <a:p/>
+        </p:txBody>
       </p:sp>
       <p:sp>
         <p:nvSpPr>
@@ -28266,6 +28842,10 @@
             </a:outerShdw>
           </a:effectLst>
         </p:spPr>
+        <p:txBody>
+          <a:bodyPr/>
+          <a:p/>
+        </p:txBody>
       </p:sp>
       <p:sp>
         <p:nvSpPr>
@@ -28960,6 +29540,10 @@
             </a:outerShdw>
           </a:effectLst>
         </p:spPr>
+        <p:txBody>
+          <a:bodyPr/>
+          <a:p/>
+        </p:txBody>
       </p:sp>
       <p:sp>
         <p:nvSpPr>
@@ -29672,6 +30256,10 @@
           </a:solidFill>
           <a:ln/>
         </p:spPr>
+        <p:txBody>
+          <a:bodyPr/>
+          <a:p/>
+        </p:txBody>
       </p:sp>
       <p:sp>
         <p:nvSpPr>
@@ -29692,6 +30280,10 @@
           </a:solidFill>
           <a:ln/>
         </p:spPr>
+        <p:txBody>
+          <a:bodyPr/>
+          <a:p/>
+        </p:txBody>
       </p:sp>
       <p:sp>
         <p:nvSpPr>
@@ -29882,6 +30474,10 @@
             </a:outerShdw>
           </a:effectLst>
         </p:spPr>
+        <p:txBody>
+          <a:bodyPr/>
+          <a:p/>
+        </p:txBody>
       </p:sp>
       <p:sp>
         <p:nvSpPr>
@@ -30068,6 +30664,10 @@
             </a:outerShdw>
           </a:effectLst>
         </p:spPr>
+        <p:txBody>
+          <a:bodyPr/>
+          <a:p/>
+        </p:txBody>
       </p:sp>
       <p:sp>
         <p:nvSpPr>
@@ -30134,6 +30734,10 @@
             <a:prstDash val="solid"/>
           </a:ln>
         </p:spPr>
+        <p:txBody>
+          <a:bodyPr/>
+          <a:p/>
+        </p:txBody>
       </p:sp>
       <p:sp>
         <p:nvSpPr>
@@ -30239,6 +30843,10 @@
           </a:solidFill>
           <a:ln/>
         </p:spPr>
+        <p:txBody>
+          <a:bodyPr/>
+          <a:p/>
+        </p:txBody>
       </p:sp>
       <p:sp>
         <p:nvSpPr>
@@ -30259,6 +30867,10 @@
           </a:solidFill>
           <a:ln/>
         </p:spPr>
+        <p:txBody>
+          <a:bodyPr/>
+          <a:p/>
+        </p:txBody>
       </p:sp>
       <p:sp>
         <p:nvSpPr>
@@ -30449,6 +31061,10 @@
             </a:outerShdw>
           </a:effectLst>
         </p:spPr>
+        <p:txBody>
+          <a:bodyPr/>
+          <a:p/>
+        </p:txBody>
       </p:sp>
       <p:sp>
         <p:nvSpPr>
@@ -30508,6 +31124,10 @@
           </a:solidFill>
           <a:ln/>
         </p:spPr>
+        <p:txBody>
+          <a:bodyPr/>
+          <a:p/>
+        </p:txBody>
       </p:sp>
       <p:sp>
         <p:nvSpPr>
@@ -30606,6 +31226,10 @@
           </a:solidFill>
           <a:ln/>
         </p:spPr>
+        <p:txBody>
+          <a:bodyPr/>
+          <a:p/>
+        </p:txBody>
       </p:sp>
       <p:sp>
         <p:nvSpPr>
@@ -30704,6 +31328,10 @@
           </a:solidFill>
           <a:ln/>
         </p:spPr>
+        <p:txBody>
+          <a:bodyPr/>
+          <a:p/>
+        </p:txBody>
       </p:sp>
       <p:sp>
         <p:nvSpPr>
@@ -30802,6 +31430,10 @@
           </a:solidFill>
           <a:ln/>
         </p:spPr>
+        <p:txBody>
+          <a:bodyPr/>
+          <a:p/>
+        </p:txBody>
       </p:sp>
       <p:sp>
         <p:nvSpPr>
@@ -30907,6 +31539,10 @@
             <a:prstDash val="solid"/>
           </a:ln>
         </p:spPr>
+        <p:txBody>
+          <a:bodyPr/>
+          <a:p/>
+        </p:txBody>
       </p:sp>
       <p:sp>
         <p:nvSpPr>
@@ -30997,6 +31633,10 @@
             </a:outerShdw>
           </a:effectLst>
         </p:spPr>
+        <p:txBody>
+          <a:bodyPr/>
+          <a:p/>
+        </p:txBody>
       </p:sp>
       <p:sp>
         <p:nvSpPr>
@@ -31088,6 +31728,10 @@
           </a:solidFill>
           <a:ln/>
         </p:spPr>
+        <p:txBody>
+          <a:bodyPr/>
+          <a:p/>
+        </p:txBody>
       </p:sp>
       <p:sp>
         <p:nvSpPr>
@@ -31108,6 +31752,10 @@
           </a:solidFill>
           <a:ln/>
         </p:spPr>
+        <p:txBody>
+          <a:bodyPr/>
+          <a:p/>
+        </p:txBody>
       </p:sp>
       <p:sp>
         <p:nvSpPr>
@@ -31291,6 +31939,10 @@
             <a:prstDash val="solid"/>
           </a:ln>
         </p:spPr>
+        <p:txBody>
+          <a:bodyPr/>
+          <a:p/>
+        </p:txBody>
       </p:sp>
       <p:sp>
         <p:nvSpPr>
@@ -31371,6 +32023,10 @@
             <a:tailEnd type="triangle"/>
           </a:ln>
         </p:spPr>
+        <p:txBody>
+          <a:bodyPr/>
+          <a:p/>
+        </p:txBody>
       </p:sp>
       <p:sp>
         <p:nvSpPr>
@@ -31398,6 +32054,10 @@
             <a:prstDash val="solid"/>
           </a:ln>
         </p:spPr>
+        <p:txBody>
+          <a:bodyPr/>
+          <a:p/>
+        </p:txBody>
       </p:sp>
       <p:sp>
         <p:nvSpPr>
@@ -31478,6 +32138,10 @@
             <a:tailEnd type="triangle"/>
           </a:ln>
         </p:spPr>
+        <p:txBody>
+          <a:bodyPr/>
+          <a:p/>
+        </p:txBody>
       </p:sp>
       <p:sp>
         <p:nvSpPr>
@@ -31505,6 +32169,10 @@
             <a:prstDash val="solid"/>
           </a:ln>
         </p:spPr>
+        <p:txBody>
+          <a:bodyPr/>
+          <a:p/>
+        </p:txBody>
       </p:sp>
       <p:sp>
         <p:nvSpPr>
@@ -31585,6 +32253,10 @@
             <a:tailEnd type="triangle"/>
           </a:ln>
         </p:spPr>
+        <p:txBody>
+          <a:bodyPr/>
+          <a:p/>
+        </p:txBody>
       </p:sp>
       <p:sp>
         <p:nvSpPr>
@@ -31612,6 +32284,10 @@
             <a:prstDash val="solid"/>
           </a:ln>
         </p:spPr>
+        <p:txBody>
+          <a:bodyPr/>
+          <a:p/>
+        </p:txBody>
       </p:sp>
       <p:sp>
         <p:nvSpPr>
@@ -31724,6 +32400,10 @@
             </a:outerShdw>
           </a:effectLst>
         </p:spPr>
+        <p:txBody>
+          <a:bodyPr/>
+          <a:p/>
+        </p:txBody>
       </p:sp>
       <p:sp>
         <p:nvSpPr>
@@ -32517,6 +33197,10 @@
             </a:outerShdw>
           </a:effectLst>
         </p:spPr>
+        <p:txBody>
+          <a:bodyPr/>
+          <a:p/>
+        </p:txBody>
       </p:sp>
       <p:sp>
         <p:nvSpPr>
